--- a/exercises/unit-tests/instructions.pptx
+++ b/exercises/unit-tests/instructions.pptx
@@ -17108,7 +17108,7 @@
         </p:blipFill>
         <p:spPr>
           <a:xfrm>
-            <a:off x="220975" y="1114097"/>
+            <a:off x="199954" y="1487594"/>
             <a:ext cx="11568684" cy="1745753"/>
           </a:xfrm>
           <a:prstGeom prst="rect">
@@ -17130,7 +17130,7 @@
         </p:nvSpPr>
         <p:spPr>
           <a:xfrm>
-            <a:off x="3046249" y="2898813"/>
+            <a:off x="3025228" y="3272310"/>
             <a:ext cx="5427576" cy="369332"/>
           </a:xfrm>
           <a:prstGeom prst="rect">
@@ -17155,6 +17155,90 @@
               <a:t>https://en.wikipedia.org/wiki/Code_coverage</a:t>
             </a:r>
             <a:endParaRPr lang="en-US" dirty="0"/>
+          </a:p>
+        </p:txBody>
+      </p:sp>
+      <p:sp>
+        <p:nvSpPr>
+          <p:cNvPr id="25" name="TextBox 24">
+            <a:extLst>
+              <a:ext uri="{FF2B5EF4-FFF2-40B4-BE49-F238E27FC236}">
+                <a16:creationId xmlns:a16="http://schemas.microsoft.com/office/drawing/2014/main" id="{250E282A-5232-456E-1D93-4BCFD6FC631F}"/>
+              </a:ext>
+            </a:extLst>
+          </p:cNvPr>
+          <p:cNvSpPr txBox="1"/>
+          <p:nvPr/>
+        </p:nvSpPr>
+        <p:spPr>
+          <a:xfrm>
+            <a:off x="297792" y="4592779"/>
+            <a:ext cx="7790081" cy="369332"/>
+          </a:xfrm>
+          <a:prstGeom prst="rect">
+            <a:avLst/>
+          </a:prstGeom>
+          <a:noFill/>
+        </p:spPr>
+        <p:txBody>
+          <a:bodyPr wrap="none" rtlCol="0">
+            <a:spAutoFit/>
+          </a:bodyPr>
+          <a:lstStyle/>
+          <a:p>
+            <a:r>
+              <a:rPr lang="en-US" dirty="0"/>
+              <a:t>Check out the </a:t>
+            </a:r>
+            <a:r>
+              <a:rPr lang="en-US" b="1" dirty="0"/>
+              <a:t>how to </a:t>
+            </a:r>
+            <a:r>
+              <a:rPr lang="en-US" dirty="0"/>
+              <a:t>code coverage guide to analyze your codebase quickly:</a:t>
+            </a:r>
+          </a:p>
+        </p:txBody>
+      </p:sp>
+      <p:sp>
+        <p:nvSpPr>
+          <p:cNvPr id="27" name="TextBox 26">
+            <a:extLst>
+              <a:ext uri="{FF2B5EF4-FFF2-40B4-BE49-F238E27FC236}">
+                <a16:creationId xmlns:a16="http://schemas.microsoft.com/office/drawing/2014/main" id="{41BC6808-B9F9-0DE4-3934-BD08127FB542}"/>
+              </a:ext>
+            </a:extLst>
+          </p:cNvPr>
+          <p:cNvSpPr txBox="1"/>
+          <p:nvPr/>
+        </p:nvSpPr>
+        <p:spPr>
+          <a:xfrm>
+            <a:off x="693222" y="5001074"/>
+            <a:ext cx="11075416" cy="369332"/>
+          </a:xfrm>
+          <a:prstGeom prst="rect">
+            <a:avLst/>
+          </a:prstGeom>
+          <a:noFill/>
+        </p:spPr>
+        <p:txBody>
+          <a:bodyPr wrap="square">
+            <a:spAutoFit/>
+          </a:bodyPr>
+          <a:lstStyle/>
+          <a:p>
+            <a:r>
+              <a:rPr lang="en-US" dirty="0">
+                <a:hlinkClick r:id="rId5"/>
+              </a:rPr>
+              <a:t>https://github.com/sefop/training-testing-python/blob/main/exercises/unit-tests/how-to-code-coverage.md</a:t>
+            </a:r>
+            <a:r>
+              <a:rPr lang="en-US" dirty="0"/>
+              <a:t> </a:t>
+            </a:r>
           </a:p>
         </p:txBody>
       </p:sp>
